--- a/Fase 1/Evidencias Grupales/Presentacion_Proyecto.pptx
+++ b/Fase 1/Evidencias Grupales/Presentacion_Proyecto.pptx
@@ -4913,7 +4913,7 @@
               </a:rPr>
               <a:t>Diego: Me interesa el desarrollo de software y la automatización de procesos, más que liderar o coordinar personas. En este proyecto me tocó asumir el rol de contacto con el cliente, lo que fue un desafío distinto a lo que naturalmente disfruto hacer.
 Andrés: Me motivan el análisis de requisitos y la gestión de proyectos y calidad; lidero el levantamiento con Easy Office y valido que la solución cumpla lo acordado con el cliente.
-Duncan: Me interesa desarrollar soluciones, optimizaciones y automatizaciones para diversas problemáticas que se presenten en el día a día laboral y disfruto de transformar datos dispersos en modelos claros y consultables, optimizando el funcionamiento, almacenamiento y rendimiento para así generar valor real a partir de decisiones informadas.</a:t>
+Dunkan: Me interesa desarrollar soluciones, optimizaciones y automatizaciones para diversas problemáticas que se presenten en el día a día laboral y disfruto de transformar datos dispersos en modelos claros y consultables, optimizando el funcionamiento, almacenamiento y rendimiento para así generar valor real a partir de decisiones informadas.</a:t>
             </a:r>
           </a:p>
         </p:txBody>

--- a/Fase 1/Evidencias Grupales/Presentacion_Proyecto.pptx
+++ b/Fase 1/Evidencias Grupales/Presentacion_Proyecto.pptx
@@ -5167,7 +5167,7 @@
                 <a:ea typeface="Calibri" pitchFamily="34" charset="-122"/>
                 <a:cs typeface="Calibri" pitchFamily="34" charset="-120"/>
               </a:rPr>
-              <a:t>www.easyoffice.cl</a:t>
+              <a:t>Fuente: easyoffice.cl</a:t>
             </a:r>
             <a:endParaRPr lang="es-MX" sz="1200" noProof="0" dirty="0"/>
           </a:p>
@@ -9468,7 +9468,7 @@
                 <a:ea typeface="Calibri" pitchFamily="34" charset="-122"/>
                 <a:cs typeface="Calibri" pitchFamily="34" charset="-120"/>
               </a:rPr>
-              <a:t>Líder de proyecto</a:t>
+              <a:t>Product Owner</a:t>
             </a:r>
             <a:endParaRPr lang="es-MX" sz="1250" noProof="0" dirty="0"/>
           </a:p>
@@ -9698,7 +9698,7 @@
                 <a:ea typeface="Calibri" pitchFamily="34" charset="-122"/>
                 <a:cs typeface="Calibri" pitchFamily="34" charset="-120"/>
               </a:rPr>
-              <a:t>Levantamiento documental</a:t>
+              <a:t>Scrum Master</a:t>
             </a:r>
             <a:endParaRPr lang="es-MX" sz="1250" noProof="0" dirty="0"/>
           </a:p>
@@ -9878,7 +9878,7 @@
                 <a:ea typeface="Calibri" pitchFamily="34" charset="-122"/>
                 <a:cs typeface="Calibri" pitchFamily="34" charset="-120"/>
               </a:rPr>
-              <a:t>QA – Desarrollo </a:t>
+              <a:t>Developer (QA) – </a:t>
             </a:r>
             <a:r>
               <a:rPr lang="es-MX" sz="1250" b="1" noProof="0" dirty="0" err="1">
